--- a/08. WoT Proxy/WoT Proxy.pptx
+++ b/08. WoT Proxy/WoT Proxy.pptx
@@ -300,6 +300,128 @@
 
 <file path=ppt/changesInfos/changesInfo1.xml><?xml version="1.0" encoding="utf-8"?>
 <pc:chgInfo xmlns:a="http://schemas.openxmlformats.org/drawingml/2006/main" xmlns:r="http://schemas.openxmlformats.org/officeDocument/2006/relationships" xmlns:ac="http://schemas.microsoft.com/office/drawing/2013/main/command" xmlns:pc="http://schemas.microsoft.com/office/powerpoint/2013/main/command">
+  <pc:docChgLst>
+    <pc:chgData name="Riccardo Berta" userId="c8694f89-bba4-4576-b0a8-456619ca5a8c" providerId="ADAL" clId="{8D7612B8-4A89-7147-83EB-CC6D6644EDB8}"/>
+    <pc:docChg chg="custSel addSld delSld modSld sldOrd">
+      <pc:chgData name="Riccardo Berta" userId="c8694f89-bba4-4576-b0a8-456619ca5a8c" providerId="ADAL" clId="{8D7612B8-4A89-7147-83EB-CC6D6644EDB8}" dt="2022-04-27T07:21:55.498" v="135" actId="1076"/>
+      <pc:docMkLst>
+        <pc:docMk/>
+      </pc:docMkLst>
+      <pc:sldChg chg="modSp mod ord">
+        <pc:chgData name="Riccardo Berta" userId="c8694f89-bba4-4576-b0a8-456619ca5a8c" providerId="ADAL" clId="{8D7612B8-4A89-7147-83EB-CC6D6644EDB8}" dt="2022-04-27T06:28:18.405" v="9" actId="20577"/>
+        <pc:sldMkLst>
+          <pc:docMk/>
+          <pc:sldMk cId="0" sldId="258"/>
+        </pc:sldMkLst>
+        <pc:spChg chg="mod">
+          <ac:chgData name="Riccardo Berta" userId="c8694f89-bba4-4576-b0a8-456619ca5a8c" providerId="ADAL" clId="{8D7612B8-4A89-7147-83EB-CC6D6644EDB8}" dt="2022-04-27T06:28:18.405" v="9" actId="20577"/>
+          <ac:spMkLst>
+            <pc:docMk/>
+            <pc:sldMk cId="0" sldId="258"/>
+            <ac:spMk id="90" creationId="{00000000-0000-0000-0000-000000000000}"/>
+          </ac:spMkLst>
+        </pc:spChg>
+      </pc:sldChg>
+      <pc:sldChg chg="del ord">
+        <pc:chgData name="Riccardo Berta" userId="c8694f89-bba4-4576-b0a8-456619ca5a8c" providerId="ADAL" clId="{8D7612B8-4A89-7147-83EB-CC6D6644EDB8}" dt="2022-04-27T06:30:55.062" v="71" actId="2696"/>
+        <pc:sldMkLst>
+          <pc:docMk/>
+          <pc:sldMk cId="0" sldId="262"/>
+        </pc:sldMkLst>
+      </pc:sldChg>
+      <pc:sldChg chg="addSp modSp mod modNotes">
+        <pc:chgData name="Riccardo Berta" userId="c8694f89-bba4-4576-b0a8-456619ca5a8c" providerId="ADAL" clId="{8D7612B8-4A89-7147-83EB-CC6D6644EDB8}" dt="2022-04-27T07:21:55.498" v="135" actId="1076"/>
+        <pc:sldMkLst>
+          <pc:docMk/>
+          <pc:sldMk cId="0" sldId="267"/>
+        </pc:sldMkLst>
+        <pc:spChg chg="add mod">
+          <ac:chgData name="Riccardo Berta" userId="c8694f89-bba4-4576-b0a8-456619ca5a8c" providerId="ADAL" clId="{8D7612B8-4A89-7147-83EB-CC6D6644EDB8}" dt="2022-04-27T07:21:55.498" v="135" actId="1076"/>
+          <ac:spMkLst>
+            <pc:docMk/>
+            <pc:sldMk cId="0" sldId="267"/>
+            <ac:spMk id="51" creationId="{2CBA5F7A-FA46-326A-2219-74FE2ECCEE00}"/>
+          </ac:spMkLst>
+        </pc:spChg>
+      </pc:sldChg>
+      <pc:sldChg chg="modSp mod ord">
+        <pc:chgData name="Riccardo Berta" userId="c8694f89-bba4-4576-b0a8-456619ca5a8c" providerId="ADAL" clId="{8D7612B8-4A89-7147-83EB-CC6D6644EDB8}" dt="2022-04-27T06:49:22.879" v="133" actId="20577"/>
+        <pc:sldMkLst>
+          <pc:docMk/>
+          <pc:sldMk cId="0" sldId="272"/>
+        </pc:sldMkLst>
+        <pc:spChg chg="mod">
+          <ac:chgData name="Riccardo Berta" userId="c8694f89-bba4-4576-b0a8-456619ca5a8c" providerId="ADAL" clId="{8D7612B8-4A89-7147-83EB-CC6D6644EDB8}" dt="2022-04-27T06:49:22.879" v="133" actId="20577"/>
+          <ac:spMkLst>
+            <pc:docMk/>
+            <pc:sldMk cId="0" sldId="272"/>
+            <ac:spMk id="421" creationId="{00000000-0000-0000-0000-000000000000}"/>
+          </ac:spMkLst>
+        </pc:spChg>
+        <pc:spChg chg="mod">
+          <ac:chgData name="Riccardo Berta" userId="c8694f89-bba4-4576-b0a8-456619ca5a8c" providerId="ADAL" clId="{8D7612B8-4A89-7147-83EB-CC6D6644EDB8}" dt="2022-04-27T06:29:54.416" v="61" actId="1076"/>
+          <ac:spMkLst>
+            <pc:docMk/>
+            <pc:sldMk cId="0" sldId="272"/>
+            <ac:spMk id="422" creationId="{00000000-0000-0000-0000-000000000000}"/>
+          </ac:spMkLst>
+        </pc:spChg>
+        <pc:picChg chg="mod">
+          <ac:chgData name="Riccardo Berta" userId="c8694f89-bba4-4576-b0a8-456619ca5a8c" providerId="ADAL" clId="{8D7612B8-4A89-7147-83EB-CC6D6644EDB8}" dt="2022-04-27T06:29:57.760" v="62" actId="1076"/>
+          <ac:picMkLst>
+            <pc:docMk/>
+            <pc:sldMk cId="0" sldId="272"/>
+            <ac:picMk id="423" creationId="{00000000-0000-0000-0000-000000000000}"/>
+          </ac:picMkLst>
+        </pc:picChg>
+      </pc:sldChg>
+      <pc:sldChg chg="modSp mod">
+        <pc:chgData name="Riccardo Berta" userId="c8694f89-bba4-4576-b0a8-456619ca5a8c" providerId="ADAL" clId="{8D7612B8-4A89-7147-83EB-CC6D6644EDB8}" dt="2022-04-27T06:30:52.879" v="70" actId="5793"/>
+        <pc:sldMkLst>
+          <pc:docMk/>
+          <pc:sldMk cId="0" sldId="274"/>
+        </pc:sldMkLst>
+        <pc:spChg chg="mod">
+          <ac:chgData name="Riccardo Berta" userId="c8694f89-bba4-4576-b0a8-456619ca5a8c" providerId="ADAL" clId="{8D7612B8-4A89-7147-83EB-CC6D6644EDB8}" dt="2022-04-27T06:30:52.879" v="70" actId="5793"/>
+          <ac:spMkLst>
+            <pc:docMk/>
+            <pc:sldMk cId="0" sldId="274"/>
+            <ac:spMk id="435" creationId="{00000000-0000-0000-0000-000000000000}"/>
+          </ac:spMkLst>
+        </pc:spChg>
+      </pc:sldChg>
+      <pc:sldChg chg="new del">
+        <pc:chgData name="Riccardo Berta" userId="c8694f89-bba4-4576-b0a8-456619ca5a8c" providerId="ADAL" clId="{8D7612B8-4A89-7147-83EB-CC6D6644EDB8}" dt="2022-04-27T06:32:40.021" v="73" actId="2696"/>
+        <pc:sldMkLst>
+          <pc:docMk/>
+          <pc:sldMk cId="122328461" sldId="275"/>
+        </pc:sldMkLst>
+      </pc:sldChg>
+      <pc:sldChg chg="modSp new del mod">
+        <pc:chgData name="Riccardo Berta" userId="c8694f89-bba4-4576-b0a8-456619ca5a8c" providerId="ADAL" clId="{8D7612B8-4A89-7147-83EB-CC6D6644EDB8}" dt="2022-04-27T06:33:38.608" v="115" actId="2696"/>
+        <pc:sldMkLst>
+          <pc:docMk/>
+          <pc:sldMk cId="2967267371" sldId="275"/>
+        </pc:sldMkLst>
+        <pc:spChg chg="mod">
+          <ac:chgData name="Riccardo Berta" userId="c8694f89-bba4-4576-b0a8-456619ca5a8c" providerId="ADAL" clId="{8D7612B8-4A89-7147-83EB-CC6D6644EDB8}" dt="2022-04-27T06:33:20.708" v="112" actId="20577"/>
+          <ac:spMkLst>
+            <pc:docMk/>
+            <pc:sldMk cId="2967267371" sldId="275"/>
+            <ac:spMk id="2" creationId="{862E3DA5-528D-DB80-A0F7-77D52A68AC99}"/>
+          </ac:spMkLst>
+        </pc:spChg>
+        <pc:spChg chg="mod">
+          <ac:chgData name="Riccardo Berta" userId="c8694f89-bba4-4576-b0a8-456619ca5a8c" providerId="ADAL" clId="{8D7612B8-4A89-7147-83EB-CC6D6644EDB8}" dt="2022-04-27T06:33:35.363" v="114" actId="20577"/>
+          <ac:spMkLst>
+            <pc:docMk/>
+            <pc:sldMk cId="2967267371" sldId="275"/>
+            <ac:spMk id="3" creationId="{7543D13F-31E6-4BF6-BAA3-83099839018F}"/>
+          </ac:spMkLst>
+        </pc:spChg>
+      </pc:sldChg>
+    </pc:docChg>
+  </pc:docChgLst>
   <pc:docChgLst>
     <pc:chgData name="Riccardo Berta" userId="c8694f89-bba4-4576-b0a8-456619ca5a8c" providerId="ADAL" clId="{ED9EC3B2-E4AD-9743-928A-346B9321CC1A}"/>
     <pc:docChg chg="undo custSel modSld">
@@ -1245,128 +1367,6 @@
       </pc:sldChg>
     </pc:docChg>
   </pc:docChgLst>
-  <pc:docChgLst>
-    <pc:chgData name="Riccardo Berta" userId="c8694f89-bba4-4576-b0a8-456619ca5a8c" providerId="ADAL" clId="{8D7612B8-4A89-7147-83EB-CC6D6644EDB8}"/>
-    <pc:docChg chg="custSel addSld delSld modSld sldOrd">
-      <pc:chgData name="Riccardo Berta" userId="c8694f89-bba4-4576-b0a8-456619ca5a8c" providerId="ADAL" clId="{8D7612B8-4A89-7147-83EB-CC6D6644EDB8}" dt="2022-04-27T07:21:55.498" v="135" actId="1076"/>
-      <pc:docMkLst>
-        <pc:docMk/>
-      </pc:docMkLst>
-      <pc:sldChg chg="modSp mod ord">
-        <pc:chgData name="Riccardo Berta" userId="c8694f89-bba4-4576-b0a8-456619ca5a8c" providerId="ADAL" clId="{8D7612B8-4A89-7147-83EB-CC6D6644EDB8}" dt="2022-04-27T06:28:18.405" v="9" actId="20577"/>
-        <pc:sldMkLst>
-          <pc:docMk/>
-          <pc:sldMk cId="0" sldId="258"/>
-        </pc:sldMkLst>
-        <pc:spChg chg="mod">
-          <ac:chgData name="Riccardo Berta" userId="c8694f89-bba4-4576-b0a8-456619ca5a8c" providerId="ADAL" clId="{8D7612B8-4A89-7147-83EB-CC6D6644EDB8}" dt="2022-04-27T06:28:18.405" v="9" actId="20577"/>
-          <ac:spMkLst>
-            <pc:docMk/>
-            <pc:sldMk cId="0" sldId="258"/>
-            <ac:spMk id="90" creationId="{00000000-0000-0000-0000-000000000000}"/>
-          </ac:spMkLst>
-        </pc:spChg>
-      </pc:sldChg>
-      <pc:sldChg chg="del ord">
-        <pc:chgData name="Riccardo Berta" userId="c8694f89-bba4-4576-b0a8-456619ca5a8c" providerId="ADAL" clId="{8D7612B8-4A89-7147-83EB-CC6D6644EDB8}" dt="2022-04-27T06:30:55.062" v="71" actId="2696"/>
-        <pc:sldMkLst>
-          <pc:docMk/>
-          <pc:sldMk cId="0" sldId="262"/>
-        </pc:sldMkLst>
-      </pc:sldChg>
-      <pc:sldChg chg="addSp modSp mod modNotes">
-        <pc:chgData name="Riccardo Berta" userId="c8694f89-bba4-4576-b0a8-456619ca5a8c" providerId="ADAL" clId="{8D7612B8-4A89-7147-83EB-CC6D6644EDB8}" dt="2022-04-27T07:21:55.498" v="135" actId="1076"/>
-        <pc:sldMkLst>
-          <pc:docMk/>
-          <pc:sldMk cId="0" sldId="267"/>
-        </pc:sldMkLst>
-        <pc:spChg chg="add mod">
-          <ac:chgData name="Riccardo Berta" userId="c8694f89-bba4-4576-b0a8-456619ca5a8c" providerId="ADAL" clId="{8D7612B8-4A89-7147-83EB-CC6D6644EDB8}" dt="2022-04-27T07:21:55.498" v="135" actId="1076"/>
-          <ac:spMkLst>
-            <pc:docMk/>
-            <pc:sldMk cId="0" sldId="267"/>
-            <ac:spMk id="51" creationId="{2CBA5F7A-FA46-326A-2219-74FE2ECCEE00}"/>
-          </ac:spMkLst>
-        </pc:spChg>
-      </pc:sldChg>
-      <pc:sldChg chg="modSp mod ord">
-        <pc:chgData name="Riccardo Berta" userId="c8694f89-bba4-4576-b0a8-456619ca5a8c" providerId="ADAL" clId="{8D7612B8-4A89-7147-83EB-CC6D6644EDB8}" dt="2022-04-27T06:49:22.879" v="133" actId="20577"/>
-        <pc:sldMkLst>
-          <pc:docMk/>
-          <pc:sldMk cId="0" sldId="272"/>
-        </pc:sldMkLst>
-        <pc:spChg chg="mod">
-          <ac:chgData name="Riccardo Berta" userId="c8694f89-bba4-4576-b0a8-456619ca5a8c" providerId="ADAL" clId="{8D7612B8-4A89-7147-83EB-CC6D6644EDB8}" dt="2022-04-27T06:49:22.879" v="133" actId="20577"/>
-          <ac:spMkLst>
-            <pc:docMk/>
-            <pc:sldMk cId="0" sldId="272"/>
-            <ac:spMk id="421" creationId="{00000000-0000-0000-0000-000000000000}"/>
-          </ac:spMkLst>
-        </pc:spChg>
-        <pc:spChg chg="mod">
-          <ac:chgData name="Riccardo Berta" userId="c8694f89-bba4-4576-b0a8-456619ca5a8c" providerId="ADAL" clId="{8D7612B8-4A89-7147-83EB-CC6D6644EDB8}" dt="2022-04-27T06:29:54.416" v="61" actId="1076"/>
-          <ac:spMkLst>
-            <pc:docMk/>
-            <pc:sldMk cId="0" sldId="272"/>
-            <ac:spMk id="422" creationId="{00000000-0000-0000-0000-000000000000}"/>
-          </ac:spMkLst>
-        </pc:spChg>
-        <pc:picChg chg="mod">
-          <ac:chgData name="Riccardo Berta" userId="c8694f89-bba4-4576-b0a8-456619ca5a8c" providerId="ADAL" clId="{8D7612B8-4A89-7147-83EB-CC6D6644EDB8}" dt="2022-04-27T06:29:57.760" v="62" actId="1076"/>
-          <ac:picMkLst>
-            <pc:docMk/>
-            <pc:sldMk cId="0" sldId="272"/>
-            <ac:picMk id="423" creationId="{00000000-0000-0000-0000-000000000000}"/>
-          </ac:picMkLst>
-        </pc:picChg>
-      </pc:sldChg>
-      <pc:sldChg chg="modSp mod">
-        <pc:chgData name="Riccardo Berta" userId="c8694f89-bba4-4576-b0a8-456619ca5a8c" providerId="ADAL" clId="{8D7612B8-4A89-7147-83EB-CC6D6644EDB8}" dt="2022-04-27T06:30:52.879" v="70" actId="5793"/>
-        <pc:sldMkLst>
-          <pc:docMk/>
-          <pc:sldMk cId="0" sldId="274"/>
-        </pc:sldMkLst>
-        <pc:spChg chg="mod">
-          <ac:chgData name="Riccardo Berta" userId="c8694f89-bba4-4576-b0a8-456619ca5a8c" providerId="ADAL" clId="{8D7612B8-4A89-7147-83EB-CC6D6644EDB8}" dt="2022-04-27T06:30:52.879" v="70" actId="5793"/>
-          <ac:spMkLst>
-            <pc:docMk/>
-            <pc:sldMk cId="0" sldId="274"/>
-            <ac:spMk id="435" creationId="{00000000-0000-0000-0000-000000000000}"/>
-          </ac:spMkLst>
-        </pc:spChg>
-      </pc:sldChg>
-      <pc:sldChg chg="new del">
-        <pc:chgData name="Riccardo Berta" userId="c8694f89-bba4-4576-b0a8-456619ca5a8c" providerId="ADAL" clId="{8D7612B8-4A89-7147-83EB-CC6D6644EDB8}" dt="2022-04-27T06:32:40.021" v="73" actId="2696"/>
-        <pc:sldMkLst>
-          <pc:docMk/>
-          <pc:sldMk cId="122328461" sldId="275"/>
-        </pc:sldMkLst>
-      </pc:sldChg>
-      <pc:sldChg chg="modSp new del mod">
-        <pc:chgData name="Riccardo Berta" userId="c8694f89-bba4-4576-b0a8-456619ca5a8c" providerId="ADAL" clId="{8D7612B8-4A89-7147-83EB-CC6D6644EDB8}" dt="2022-04-27T06:33:38.608" v="115" actId="2696"/>
-        <pc:sldMkLst>
-          <pc:docMk/>
-          <pc:sldMk cId="2967267371" sldId="275"/>
-        </pc:sldMkLst>
-        <pc:spChg chg="mod">
-          <ac:chgData name="Riccardo Berta" userId="c8694f89-bba4-4576-b0a8-456619ca5a8c" providerId="ADAL" clId="{8D7612B8-4A89-7147-83EB-CC6D6644EDB8}" dt="2022-04-27T06:33:20.708" v="112" actId="20577"/>
-          <ac:spMkLst>
-            <pc:docMk/>
-            <pc:sldMk cId="2967267371" sldId="275"/>
-            <ac:spMk id="2" creationId="{862E3DA5-528D-DB80-A0F7-77D52A68AC99}"/>
-          </ac:spMkLst>
-        </pc:spChg>
-        <pc:spChg chg="mod">
-          <ac:chgData name="Riccardo Berta" userId="c8694f89-bba4-4576-b0a8-456619ca5a8c" providerId="ADAL" clId="{8D7612B8-4A89-7147-83EB-CC6D6644EDB8}" dt="2022-04-27T06:33:35.363" v="114" actId="20577"/>
-          <ac:spMkLst>
-            <pc:docMk/>
-            <pc:sldMk cId="2967267371" sldId="275"/>
-            <ac:spMk id="3" creationId="{7543D13F-31E6-4BF6-BAA3-83099839018F}"/>
-          </ac:spMkLst>
-        </pc:spChg>
-      </pc:sldChg>
-    </pc:docChg>
-  </pc:docChgLst>
 </pc:chgInfo>
 </file>
 
@@ -2776,7 +2776,7 @@
         </p:nvSpPr>
         <p:spPr>
           <a:xfrm>
-            <a:off x="1143309" y="685800"/>
+            <a:off x="1143000" y="685800"/>
             <a:ext cx="4572000" cy="3429000"/>
           </a:xfrm>
           <a:custGeom>
@@ -11225,6 +11225,13 @@
               <a:tailEnd type="none" w="med" len="med"/>
             </a:ln>
           </p:spPr>
+          <p:txBody>
+            <a:bodyPr/>
+            <a:lstStyle/>
+            <a:p>
+              <a:endParaRPr lang="en-GB"/>
+            </a:p>
+          </p:txBody>
         </p:sp>
         <p:sp>
           <p:nvSpPr>
@@ -11272,6 +11279,13 @@
               <a:tailEnd type="none" w="med" len="med"/>
             </a:ln>
           </p:spPr>
+          <p:txBody>
+            <a:bodyPr/>
+            <a:lstStyle/>
+            <a:p>
+              <a:endParaRPr lang="en-GB"/>
+            </a:p>
+          </p:txBody>
         </p:sp>
         <p:sp>
           <p:nvSpPr>
@@ -11319,6 +11333,13 @@
               <a:tailEnd type="none" w="med" len="med"/>
             </a:ln>
           </p:spPr>
+          <p:txBody>
+            <a:bodyPr/>
+            <a:lstStyle/>
+            <a:p>
+              <a:endParaRPr lang="en-GB"/>
+            </a:p>
+          </p:txBody>
         </p:sp>
       </p:grpSp>
       <p:sp>
@@ -13636,6 +13657,13 @@
               <a:tailEnd type="none" w="med" len="med"/>
             </a:ln>
           </p:spPr>
+          <p:txBody>
+            <a:bodyPr/>
+            <a:lstStyle/>
+            <a:p>
+              <a:endParaRPr lang="en-GB"/>
+            </a:p>
+          </p:txBody>
         </p:sp>
         <p:sp>
           <p:nvSpPr>
@@ -13683,6 +13711,13 @@
               <a:tailEnd type="none" w="med" len="med"/>
             </a:ln>
           </p:spPr>
+          <p:txBody>
+            <a:bodyPr/>
+            <a:lstStyle/>
+            <a:p>
+              <a:endParaRPr lang="en-GB"/>
+            </a:p>
+          </p:txBody>
         </p:sp>
         <p:sp>
           <p:nvSpPr>
@@ -13730,6 +13765,13 @@
               <a:tailEnd type="none" w="med" len="med"/>
             </a:ln>
           </p:spPr>
+          <p:txBody>
+            <a:bodyPr/>
+            <a:lstStyle/>
+            <a:p>
+              <a:endParaRPr lang="en-GB"/>
+            </a:p>
+          </p:txBody>
         </p:sp>
       </p:grpSp>
       <p:sp>
@@ -16207,6 +16249,13 @@
               <a:tailEnd type="none" w="med" len="med"/>
             </a:ln>
           </p:spPr>
+          <p:txBody>
+            <a:bodyPr/>
+            <a:lstStyle/>
+            <a:p>
+              <a:endParaRPr lang="en-GB"/>
+            </a:p>
+          </p:txBody>
         </p:sp>
         <p:sp>
           <p:nvSpPr>
@@ -16254,6 +16303,13 @@
               <a:tailEnd type="none" w="med" len="med"/>
             </a:ln>
           </p:spPr>
+          <p:txBody>
+            <a:bodyPr/>
+            <a:lstStyle/>
+            <a:p>
+              <a:endParaRPr lang="en-GB"/>
+            </a:p>
+          </p:txBody>
         </p:sp>
         <p:sp>
           <p:nvSpPr>
@@ -16301,6 +16357,13 @@
               <a:tailEnd type="none" w="med" len="med"/>
             </a:ln>
           </p:spPr>
+          <p:txBody>
+            <a:bodyPr/>
+            <a:lstStyle/>
+            <a:p>
+              <a:endParaRPr lang="en-GB"/>
+            </a:p>
+          </p:txBody>
         </p:sp>
       </p:grpSp>
       <p:sp>
@@ -19418,7 +19481,7 @@
             </a:pPr>
             <a:r>
               <a:rPr lang="en-GB" dirty="0"/>
-              <a:t>Generally, we have always do unit testing, manually</a:t>
+              <a:t>Generally, we have always done unit testing, manually</a:t>
             </a:r>
             <a:endParaRPr dirty="0"/>
           </a:p>
@@ -23136,7 +23199,7 @@
         </p:nvSpPr>
         <p:spPr>
           <a:xfrm>
-            <a:off x="311700" y="1210491"/>
+            <a:off x="311700" y="1125821"/>
             <a:ext cx="8520600" cy="5226276"/>
           </a:xfrm>
           <a:prstGeom prst="rect">
@@ -23163,20 +23226,86 @@
               <a:rPr lang="en-GB" dirty="0"/>
               <a:t>Where do we implement the API of the Things to integrate it to the Web?</a:t>
             </a:r>
-          </a:p>
-          <a:p>
-            <a:pPr lvl="1" indent="-342900">
-              <a:spcBef>
-                <a:spcPts val="0"/>
-              </a:spcBef>
+            <a:endParaRPr dirty="0"/>
+          </a:p>
+          <a:p>
+            <a:pPr marL="914400" lvl="1" indent="-317500" algn="l" rtl="0">
+              <a:spcBef>
+                <a:spcPts val="0"/>
+              </a:spcBef>
+              <a:spcAft>
+                <a:spcPts val="0"/>
+              </a:spcAft>
+              <a:buSzPts val="1400"/>
+              <a:buChar char="○"/>
+            </a:pPr>
+            <a:r>
+              <a:rPr lang="en-GB" dirty="0"/>
+              <a:t>not all Things are equal!</a:t>
+            </a:r>
+          </a:p>
+          <a:p>
+            <a:pPr marL="914400" lvl="1" indent="-317500" algn="l" rtl="0">
+              <a:spcBef>
+                <a:spcPts val="0"/>
+              </a:spcBef>
+              <a:spcAft>
+                <a:spcPts val="0"/>
+              </a:spcAft>
+              <a:buSzPts val="1400"/>
+              <a:buChar char="○"/>
+            </a:pPr>
+            <a:r>
+              <a:rPr lang="en-GB" dirty="0"/>
+              <a:t>some can have Internet access and implement Web protocols natively</a:t>
+            </a:r>
+            <a:endParaRPr dirty="0"/>
+          </a:p>
+          <a:p>
+            <a:pPr marL="914400" lvl="1" indent="-317500" algn="l" rtl="0">
+              <a:spcBef>
+                <a:spcPts val="0"/>
+              </a:spcBef>
+              <a:spcAft>
+                <a:spcPts val="0"/>
+              </a:spcAft>
+              <a:buSzPts val="1400"/>
+              <a:buChar char="○"/>
+            </a:pPr>
+            <a:r>
+              <a:rPr lang="en-GB" dirty="0"/>
+              <a:t>for others (power or computationally constrained) Web protocols are challenging</a:t>
+            </a:r>
+          </a:p>
+          <a:p>
+            <a:pPr marL="914400" lvl="1" indent="-317500" algn="l" rtl="0">
+              <a:spcBef>
+                <a:spcPts val="0"/>
+              </a:spcBef>
+              <a:spcAft>
+                <a:spcPts val="0"/>
+              </a:spcAft>
+              <a:buSzPts val="1400"/>
+              <a:buChar char="○"/>
+            </a:pPr>
+            <a:endParaRPr dirty="0"/>
+          </a:p>
+          <a:p>
+            <a:pPr marL="457200" lvl="0" indent="-342900" algn="l" rtl="0">
+              <a:spcBef>
+                <a:spcPts val="0"/>
+              </a:spcBef>
+              <a:spcAft>
+                <a:spcPts val="0"/>
+              </a:spcAft>
               <a:buSzPts val="1800"/>
               <a:buChar char="●"/>
             </a:pPr>
             <a:r>
-              <a:rPr lang="en-GB" dirty="0"/>
-              <a:t>not all Things are equal!</a:t>
-            </a:r>
-            <a:endParaRPr dirty="0"/>
+              <a:rPr lang="en-GB" b="1" dirty="0"/>
+              <a:t>Direct integration pattern</a:t>
+            </a:r>
+            <a:endParaRPr b="1" dirty="0"/>
           </a:p>
           <a:p>
             <a:pPr marL="914400" lvl="1" indent="-317500" algn="l" rtl="0">
@@ -23191,9 +23320,8 @@
             </a:pPr>
             <a:r>
               <a:rPr lang="en-GB" dirty="0"/>
-              <a:t>some can have Internet access and implement Web protocols natively</a:t>
-            </a:r>
-            <a:endParaRPr dirty="0"/>
+              <a:t>a Web Thing can directly offer a Web API</a:t>
+            </a:r>
           </a:p>
           <a:p>
             <a:pPr marL="914400" lvl="1" indent="-317500" algn="l" rtl="0">
@@ -23208,7 +23336,7 @@
             </a:pPr>
             <a:r>
               <a:rPr lang="en-GB" dirty="0"/>
-              <a:t>for others (power or computationally constrained) Web protocols are challenging</a:t>
+              <a:t>which means it can support HTTP/WS and TCP/IP</a:t>
             </a:r>
           </a:p>
           <a:p>
@@ -23237,7 +23365,7 @@
             </a:pPr>
             <a:r>
               <a:rPr lang="en-GB" b="1" dirty="0"/>
-              <a:t>Direct integration pattern</a:t>
+              <a:t>Gateway integration pattern</a:t>
             </a:r>
             <a:endParaRPr b="1" dirty="0"/>
           </a:p>
@@ -23254,8 +23382,9 @@
             </a:pPr>
             <a:r>
               <a:rPr lang="en-GB" dirty="0"/>
-              <a:t>a Web Thing has the ability to directly offer a Web API, which means it can support HTTP/WS and TCP/IP</a:t>
-            </a:r>
+              <a:t>a more powerful device talks to devices using non-Web protocols and exposes services via a Web API</a:t>
+            </a:r>
+            <a:endParaRPr dirty="0"/>
           </a:p>
           <a:p>
             <a:pPr marL="914400" lvl="1" indent="-317500" algn="l" rtl="0">
@@ -23268,6 +23397,22 @@
               <a:buSzPts val="1400"/>
               <a:buChar char="○"/>
             </a:pPr>
+            <a:r>
+              <a:rPr lang="en-GB" dirty="0"/>
+              <a:t>for devices that don’t connect directly to Internet (e.g. only support Bluetooth or ZigBee) or when they have very limited resources and cannot serve HTTP requests</a:t>
+            </a:r>
+          </a:p>
+          <a:p>
+            <a:pPr marL="914400" lvl="1" indent="-317500" algn="l" rtl="0">
+              <a:spcBef>
+                <a:spcPts val="0"/>
+              </a:spcBef>
+              <a:spcAft>
+                <a:spcPts val="0"/>
+              </a:spcAft>
+              <a:buSzPts val="1400"/>
+              <a:buChar char="○"/>
+            </a:pPr>
             <a:endParaRPr dirty="0"/>
           </a:p>
           <a:p>
@@ -23283,7 +23428,7 @@
             </a:pPr>
             <a:r>
               <a:rPr lang="en-GB" b="1" dirty="0"/>
-              <a:t>Gateway integration pattern</a:t>
+              <a:t>Cloud integration pattern</a:t>
             </a:r>
             <a:endParaRPr b="1" dirty="0"/>
           </a:p>
@@ -23300,14 +23445,7 @@
             </a:pPr>
             <a:r>
               <a:rPr lang="en-GB" dirty="0"/>
-              <a:t>a more powerful device talks to devices using non-Web protocols and exposes their</a:t>
-            </a:r>
-            <a:br>
-              <a:rPr lang="en-GB" dirty="0"/>
-            </a:br>
-            <a:r>
-              <a:rPr lang="en-GB" dirty="0"/>
-              <a:t>services via a Web API</a:t>
+              <a:t>a powerful and scalable Web platform acts as a gateway</a:t>
             </a:r>
             <a:endParaRPr dirty="0"/>
           </a:p>
@@ -23324,7 +23462,7 @@
             </a:pPr>
             <a:r>
               <a:rPr lang="en-GB" dirty="0"/>
-              <a:t>for devices that don’t connect directly to Internet (e.g. only support Bluetooth or ZigBee) or when they have very limited resources and cannot serve HTTP requests</a:t>
+              <a:t>for any device that can connect to a cloud server over the Internet (regardless if it uses HTTP or not) and needs more capability that it would be able to offer alone</a:t>
             </a:r>
           </a:p>
           <a:p>
@@ -23338,56 +23476,19 @@
               <a:buSzPts val="1400"/>
               <a:buChar char="○"/>
             </a:pPr>
-            <a:endParaRPr dirty="0"/>
-          </a:p>
-          <a:p>
-            <a:pPr marL="457200" lvl="0" indent="-342900" algn="l" rtl="0">
-              <a:spcBef>
-                <a:spcPts val="0"/>
-              </a:spcBef>
-              <a:spcAft>
-                <a:spcPts val="0"/>
-              </a:spcAft>
-              <a:buSzPts val="1800"/>
-              <a:buChar char="●"/>
-            </a:pPr>
-            <a:r>
-              <a:rPr lang="en-GB" b="1" dirty="0"/>
-              <a:t>Cloud integration pattern</a:t>
-            </a:r>
-            <a:endParaRPr b="1" dirty="0"/>
-          </a:p>
-          <a:p>
-            <a:pPr marL="914400" lvl="1" indent="-317500" algn="l" rtl="0">
-              <a:spcBef>
-                <a:spcPts val="0"/>
-              </a:spcBef>
-              <a:spcAft>
-                <a:spcPts val="0"/>
-              </a:spcAft>
-              <a:buSzPts val="1400"/>
-              <a:buChar char="○"/>
-            </a:pPr>
             <a:r>
               <a:rPr lang="en-GB" dirty="0"/>
-              <a:t>a powerful and scalable Web platform acts as a gateway</a:t>
-            </a:r>
-            <a:endParaRPr dirty="0"/>
-          </a:p>
-          <a:p>
-            <a:pPr marL="914400" lvl="1" indent="-317500" algn="l" rtl="0">
-              <a:spcBef>
-                <a:spcPts val="0"/>
-              </a:spcBef>
-              <a:spcAft>
-                <a:spcPts val="0"/>
-              </a:spcAft>
-              <a:buSzPts val="1400"/>
-              <a:buChar char="○"/>
-            </a:pPr>
+              <a:t>Measurify (</a:t>
+            </a:r>
+            <a:r>
+              <a:rPr lang="en-GB" dirty="0">
+                <a:hlinkClick r:id="rId3"/>
+              </a:rPr>
+              <a:t>https://measurify.org/</a:t>
+            </a:r>
             <a:r>
               <a:rPr lang="en-GB" dirty="0"/>
-              <a:t>for any device that can connect to a cloud server over the Internet (regardless if it uses HTTP or not) and needs more capability that it would be able to offer alone</a:t>
+              <a:t>) </a:t>
             </a:r>
             <a:endParaRPr dirty="0"/>
           </a:p>
@@ -25446,6 +25547,13 @@
               <a:tailEnd type="none" w="med" len="med"/>
             </a:ln>
           </p:spPr>
+          <p:txBody>
+            <a:bodyPr/>
+            <a:lstStyle/>
+            <a:p>
+              <a:endParaRPr lang="en-GB"/>
+            </a:p>
+          </p:txBody>
         </p:sp>
         <p:sp>
           <p:nvSpPr>
@@ -25493,6 +25601,13 @@
               <a:tailEnd type="none" w="med" len="med"/>
             </a:ln>
           </p:spPr>
+          <p:txBody>
+            <a:bodyPr/>
+            <a:lstStyle/>
+            <a:p>
+              <a:endParaRPr lang="en-GB"/>
+            </a:p>
+          </p:txBody>
         </p:sp>
         <p:sp>
           <p:nvSpPr>
@@ -25540,6 +25655,13 @@
               <a:tailEnd type="none" w="med" len="med"/>
             </a:ln>
           </p:spPr>
+          <p:txBody>
+            <a:bodyPr/>
+            <a:lstStyle/>
+            <a:p>
+              <a:endParaRPr lang="en-GB"/>
+            </a:p>
+          </p:txBody>
         </p:sp>
       </p:grpSp>
       <p:sp>
@@ -26904,6 +27026,13 @@
               <a:tailEnd type="none" w="med" len="med"/>
             </a:ln>
           </p:spPr>
+          <p:txBody>
+            <a:bodyPr/>
+            <a:lstStyle/>
+            <a:p>
+              <a:endParaRPr lang="en-GB"/>
+            </a:p>
+          </p:txBody>
         </p:sp>
         <p:sp>
           <p:nvSpPr>
@@ -26951,6 +27080,13 @@
               <a:tailEnd type="none" w="med" len="med"/>
             </a:ln>
           </p:spPr>
+          <p:txBody>
+            <a:bodyPr/>
+            <a:lstStyle/>
+            <a:p>
+              <a:endParaRPr lang="en-GB"/>
+            </a:p>
+          </p:txBody>
         </p:sp>
         <p:sp>
           <p:nvSpPr>
@@ -26998,6 +27134,13 @@
               <a:tailEnd type="none" w="med" len="med"/>
             </a:ln>
           </p:spPr>
+          <p:txBody>
+            <a:bodyPr/>
+            <a:lstStyle/>
+            <a:p>
+              <a:endParaRPr lang="en-GB"/>
+            </a:p>
+          </p:txBody>
         </p:sp>
       </p:grpSp>
       <p:sp>
